--- a/courses/learn_partitioning/module04-01-multilevel-partition/slides.pptx
+++ b/courses/learn_partitioning/module04-01-multilevel-partition/slides.pptx
@@ -16,6 +16,9 @@
     <p:sldId id="264" r:id="rId16"/>
     <p:sldId id="265" r:id="rId17"/>
     <p:sldId id="266" r:id="rId18"/>
+    <p:sldId id="267" r:id="rId19"/>
+    <p:sldId id="268" r:id="rId20"/>
+    <p:sldId id="269" r:id="rId21"/>
   </p:sldIdLst>
   <p:sldSz cx="12191695" cy="6858000" type="screen4x3"/>
   <p:notesSz cx="6858000" cy="9144000"/>
@@ -582,7 +585,7 @@
           <a:lstStyle/>
           <a:p>
             <a:r>
-              <a:t>Common traps: optimizing cut while ignoring balance; reporting pairwise cut when the instance is a hypergraph; flipping locked terminals; and stopping before rollback to the best KL or FM prefix. For multilevel flows, verify coarsening before you blame the refiner.</a:t>
+              <a:t>In the browser lab track, open the **multilevel-partition** lab from the tools shelf. Load the starter graph, run the algorithm once, and read cutsize and balance in the metrics panel. Work the challenges that lock the goldens, then come back to implement the same loop yourself.</a:t>
             </a:r>
           </a:p>
         </p:txBody>
@@ -652,6 +655,146 @@
           <a:lstStyle/>
           <a:p>
             <a:r>
+              <a:t>In the implement track, open this module's EXAMPLES.md Pseudocode section and the course common solvers. Parse the tiny graph, run the algorithm with a deterministic seed, and print the assignment plus cutsize and balance. Match the browser goldens before you claim the checklist.</a:t>
+            </a:r>
+          </a:p>
+        </p:txBody>
+      </p:sp>
+      <p:sp>
+        <p:nvSpPr>
+          <p:cNvPr id="4" name="Slide Number Placeholder 3"/>
+          <p:cNvSpPr>
+            <a:spLocks noGrp="1"/>
+          </p:cNvSpPr>
+          <p:nvPr>
+            <p:ph type="sldNum" idx="5" sz="quarter"/>
+          </p:nvPr>
+        </p:nvSpPr>
+        <p:spPr/>
+      </p:sp>
+    </p:spTree>
+  </p:cSld>
+  <p:clrMapOvr>
+    <a:masterClrMapping/>
+  </p:clrMapOvr>
+</p:notes>
+</file>
+
+<file path=ppt/notesSlides/notesSlide12.xml><?xml version="1.0" encoding="utf-8"?>
+<p:notes xmlns:a="http://schemas.openxmlformats.org/drawingml/2006/main" xmlns:p="http://schemas.openxmlformats.org/presentationml/2006/main" xmlns:r="http://schemas.openxmlformats.org/officeDocument/2006/relationships">
+  <p:cSld>
+    <p:spTree>
+      <p:nvGrpSpPr>
+        <p:cNvPr id="1" name=""/>
+        <p:cNvGrpSpPr/>
+        <p:nvPr/>
+      </p:nvGrpSpPr>
+      <p:grpSpPr>
+        <a:xfrm>
+          <a:off x="0" y="0"/>
+          <a:ext cx="0" cy="0"/>
+          <a:chOff x="0" y="0"/>
+          <a:chExt cx="0" cy="0"/>
+        </a:xfrm>
+      </p:grpSpPr>
+      <p:sp>
+        <p:nvSpPr>
+          <p:cNvPr id="2" name="Slide Image Placeholder 1"/>
+          <p:cNvSpPr>
+            <a:spLocks noGrp="1"/>
+          </p:cNvSpPr>
+          <p:nvPr>
+            <p:ph type="sldImg" idx="2"/>
+          </p:nvPr>
+        </p:nvSpPr>
+        <p:spPr/>
+      </p:sp>
+      <p:sp>
+        <p:nvSpPr>
+          <p:cNvPr id="3" name="Notes Placeholder 2"/>
+          <p:cNvSpPr>
+            <a:spLocks noGrp="1"/>
+          </p:cNvSpPr>
+          <p:nvPr>
+            <p:ph type="body" idx="3" sz="quarter"/>
+          </p:nvPr>
+        </p:nvSpPr>
+        <p:spPr/>
+        <p:txBody>
+          <a:bodyPr/>
+          <a:lstStyle/>
+          <a:p>
+            <a:r>
+              <a:t>Common traps: optimizing cut while ignoring balance; reporting pairwise cut when the instance is a hypergraph; flipping locked terminals; and stopping before rollback to the best KL or FM prefix. For multilevel flows, verify coarsening before you blame the refiner.</a:t>
+            </a:r>
+          </a:p>
+        </p:txBody>
+      </p:sp>
+      <p:sp>
+        <p:nvSpPr>
+          <p:cNvPr id="4" name="Slide Number Placeholder 3"/>
+          <p:cNvSpPr>
+            <a:spLocks noGrp="1"/>
+          </p:cNvSpPr>
+          <p:nvPr>
+            <p:ph type="sldNum" idx="5" sz="quarter"/>
+          </p:nvPr>
+        </p:nvSpPr>
+        <p:spPr/>
+      </p:sp>
+    </p:spTree>
+  </p:cSld>
+  <p:clrMapOvr>
+    <a:masterClrMapping/>
+  </p:clrMapOvr>
+</p:notes>
+</file>
+
+<file path=ppt/notesSlides/notesSlide13.xml><?xml version="1.0" encoding="utf-8"?>
+<p:notes xmlns:a="http://schemas.openxmlformats.org/drawingml/2006/main" xmlns:p="http://schemas.openxmlformats.org/presentationml/2006/main" xmlns:r="http://schemas.openxmlformats.org/officeDocument/2006/relationships">
+  <p:cSld>
+    <p:spTree>
+      <p:nvGrpSpPr>
+        <p:cNvPr id="1" name=""/>
+        <p:cNvGrpSpPr/>
+        <p:nvPr/>
+      </p:nvGrpSpPr>
+      <p:grpSpPr>
+        <a:xfrm>
+          <a:off x="0" y="0"/>
+          <a:ext cx="0" cy="0"/>
+          <a:chOff x="0" y="0"/>
+          <a:chExt cx="0" cy="0"/>
+        </a:xfrm>
+      </p:grpSpPr>
+      <p:sp>
+        <p:nvSpPr>
+          <p:cNvPr id="2" name="Slide Image Placeholder 1"/>
+          <p:cNvSpPr>
+            <a:spLocks noGrp="1"/>
+          </p:cNvSpPr>
+          <p:nvPr>
+            <p:ph type="sldImg" idx="2"/>
+          </p:nvPr>
+        </p:nvSpPr>
+        <p:spPr/>
+      </p:sp>
+      <p:sp>
+        <p:nvSpPr>
+          <p:cNvPr id="3" name="Notes Placeholder 2"/>
+          <p:cNvSpPr>
+            <a:spLocks noGrp="1"/>
+          </p:cNvSpPr>
+          <p:nvPr>
+            <p:ph type="body" idx="3" sz="quarter"/>
+          </p:nvPr>
+        </p:nvSpPr>
+        <p:spPr/>
+        <p:txBody>
+          <a:bodyPr/>
+          <a:lstStyle/>
+          <a:p>
+            <a:r>
               <a:t>Complete the checklist for at least one track—preferably both. Implement until your metrics match the starter goldens. When you’re ready, take the short quiz, then continue to the next module.</a:t>
             </a:r>
           </a:p>
@@ -725,12 +868,6 @@
               <a:t>Coarsening shrinks the search space. The coarse partition is cheap. Projection gives a feasible fine assignment that FM or KL can polish. A bug in coarsening poisons every finer level—debug the hierarchy before tuning refine passes.</a:t>
             </a:r>
           </a:p>
-          <a:p/>
-          <a:p>
-            <a:r>
-              <a:t>&lt;!-- algorithm-walkthrough --&gt;</a:t>
-            </a:r>
-          </a:p>
         </p:txBody>
       </p:sp>
       <p:sp>
@@ -798,7 +935,13 @@
           <a:lstStyle/>
           <a:p>
             <a:r>
-              <a:t>Multilevel V-cycle contracts the graph via greedy pair merge to coarseK=2. Supernodes C1={A,B,C} and C2={D,E} capture community structure.</a:t>
+              <a:t>Multilevel is a V-cycle in pseudocode: coarsen, partition the tiny graph, project labels upward, and refine at each level.</a:t>
+            </a:r>
+          </a:p>
+          <a:p/>
+          <a:p>
+            <a:r>
+              <a:t>Open this module's examples file and find the Pseudocode section. That written sketch is what you implement on the implement track and what the browser challenges measure.</a:t>
             </a:r>
           </a:p>
         </p:txBody>
@@ -868,7 +1011,7 @@
           <a:lstStyle/>
           <a:p>
             <a:r>
-              <a:t>Map coarse clusters to sides 0/1: ABC→0, DE→1. Projected seed ABC|DE already has cutsize 3 — unlike BAD_SEED's cut of 12.</a:t>
+              <a:t>On TINY_GRAPH the projected seed is already ABC versus DE at cut three. Refine keeps that cut—multilevel beats polishing the cut-twelve bad seed alone.</a:t>
             </a:r>
           </a:p>
         </p:txBody>
@@ -938,7 +1081,7 @@
           <a:lstStyle/>
           <a:p>
             <a:r>
-              <a:t>FM polishes the projected seed. On TINY_GRAPH the projection is already optimal — refine keeps ABC|DE at cutsize 3.</a:t>
+              <a:t>Multilevel V-cycle contracts the graph via greedy pair merge to coarseK=2. Supernodes C1={A,B,C} and C2={D,E} capture community structure.</a:t>
             </a:r>
           </a:p>
         </p:txBody>
@@ -1008,7 +1151,7 @@
           <a:lstStyle/>
           <a:p>
             <a:r>
-              <a:t>Output renames sides to P0/P1 for placers. Final communities ABC|DE with cutsize 3 — multilevel beats refining a random bad seed alone.</a:t>
+              <a:t>Map coarse clusters to sides 0/1: ABC→0, DE→1. Projected seed ABC|DE already has cutsize 3 — unlike BAD_SEED's cut of 12.</a:t>
             </a:r>
           </a:p>
         </p:txBody>
@@ -1078,13 +1221,7 @@
           <a:lstStyle/>
           <a:p>
             <a:r>
-              <a:t>Coarsen for global structure, project, refine locally. Real placers nest this in repeated V-cycles with hyperedges and balance — this lab is the skeleton.</a:t>
-            </a:r>
-          </a:p>
-          <a:p/>
-          <a:p>
-            <a:r>
-              <a:t>&lt;!-- /algorithm-walkthrough --&gt;</a:t>
+              <a:t>FM polishes the projected seed. On TINY_GRAPH the projection is already optimal — refine keeps ABC|DE at cutsize 3.</a:t>
             </a:r>
           </a:p>
         </p:txBody>
@@ -1154,7 +1291,7 @@
           <a:lstStyle/>
           <a:p>
             <a:r>
-              <a:t>In the browser lab track, open the **multilevel-partition** lab from the tools shelf. Load the starter graph, run the algorithm once, and read cutsize and balance in the metrics panel. Work the challenges that lock the goldens, then come back to implement the same loop yourself.</a:t>
+              <a:t>Output renames sides to P0/P1 for placers. Final communities ABC|DE with cutsize 3 — multilevel beats refining a random bad seed alone.</a:t>
             </a:r>
           </a:p>
         </p:txBody>
@@ -1224,7 +1361,7 @@
           <a:lstStyle/>
           <a:p>
             <a:r>
-              <a:t>In the implement track, open this module’s examples and the course `common/` solvers. Parse the tiny graph, run the algorithm with a deterministic seed, and print the assignment plus cutsize and balance. Match the browser goldens before you claim the checklist.</a:t>
+              <a:t>Coarsen for global structure, project, refine locally. Real placers nest this in repeated V-cycles with hyperedges and balance — this lab is the skeleton.</a:t>
             </a:r>
           </a:p>
         </p:txBody>
@@ -4382,21 +4519,45 @@
                 </a:solidFill>
                 <a:latin typeface="Calibri"/>
               </a:rPr>
-              <a:t>Pitfalls</a:t>
-            </a:r>
-          </a:p>
-        </p:txBody>
-      </p:sp>
-      <p:sp>
-        <p:nvSpPr>
-          <p:cNvPr id="3" name="TextBox 2"/>
+              <a:t>Multilevel V-cycle mindset</a:t>
+            </a:r>
+          </a:p>
+        </p:txBody>
+      </p:sp>
+      <p:pic>
+        <p:nvPicPr>
+          <p:cNvPr id="3" name="Picture 2" descr="05-takeaway.png"/>
+          <p:cNvPicPr>
+            <a:picLocks noChangeAspect="1"/>
+          </p:cNvPicPr>
+          <p:nvPr/>
+        </p:nvPicPr>
+        <p:blipFill>
+          <a:blip r:embed="rId2"/>
+          <a:stretch>
+            <a:fillRect/>
+          </a:stretch>
+        </p:blipFill>
+        <p:spPr>
+          <a:xfrm>
+            <a:off x="548640" y="1143000"/>
+            <a:ext cx="9404113" cy="4572000"/>
+          </a:xfrm>
+          <a:prstGeom prst="rect">
+            <a:avLst/>
+          </a:prstGeom>
+        </p:spPr>
+      </p:pic>
+      <p:sp>
+        <p:nvSpPr>
+          <p:cNvPr id="4" name="TextBox 3"/>
           <p:cNvSpPr txBox="1"/>
           <p:nvPr/>
         </p:nvSpPr>
         <p:spPr>
           <a:xfrm>
-            <a:off x="548640" y="1234440"/>
-            <a:ext cx="11064240" cy="4937760"/>
+            <a:off x="548640" y="5897880"/>
+            <a:ext cx="11064240" cy="411480"/>
           </a:xfrm>
           <a:prstGeom prst="rect">
             <a:avLst/>
@@ -4409,54 +4570,26 @@
           </a:bodyPr>
           <a:lstStyle/>
           <a:p>
-            <a:pPr lvl="0" marL="457200" indent="-228600">
-              <a:buFont typeface="Calibri"/>
-              <a:spcAft>
-                <a:spcPts val="1000"/>
-              </a:spcAft>
-              <a:buSzPct val="100000"/>
-              <a:buChar char="•"/>
+            <a:pPr>
               <a:lnSpc>
                 <a:spcPts val="2200"/>
               </a:lnSpc>
             </a:pPr>
             <a:r>
-              <a:rPr sz="2000" b="0">
+              <a:rPr sz="1200" b="0">
                 <a:solidFill>
                   <a:srgbClr val="333333"/>
                 </a:solidFill>
                 <a:latin typeface="Calibri"/>
               </a:rPr>
-              <a:t>Common traps</a:t>
-            </a:r>
-          </a:p>
-          <a:p>
-            <a:pPr lvl="0" marL="457200" indent="-228600">
-              <a:buFont typeface="Calibri"/>
-              <a:spcAft>
-                <a:spcPts val="1000"/>
-              </a:spcAft>
-              <a:buSzPct val="100000"/>
-              <a:buChar char="•"/>
-              <a:lnSpc>
-                <a:spcPts val="2200"/>
-              </a:lnSpc>
-            </a:pPr>
-            <a:r>
-              <a:rPr sz="2000" b="0">
-                <a:solidFill>
-                  <a:srgbClr val="333333"/>
-                </a:solidFill>
-                <a:latin typeface="Calibri"/>
-              </a:rPr>
-              <a:t>For multilevel flows, verify coarsening before you blame the refiner</a:t>
-            </a:r>
-          </a:p>
-        </p:txBody>
-      </p:sp>
-      <p:sp>
-        <p:nvSpPr>
-          <p:cNvPr id="4" name="TextBox 3"/>
+              <a:t>Multilevel V-cycle mindset</a:t>
+            </a:r>
+          </a:p>
+        </p:txBody>
+      </p:sp>
+      <p:sp>
+        <p:nvSpPr>
+          <p:cNvPr id="5" name="TextBox 4"/>
           <p:cNvSpPr txBox="1"/>
           <p:nvPr/>
         </p:nvSpPr>
@@ -4545,6 +4678,557 @@
                 </a:solidFill>
                 <a:latin typeface="Calibri"/>
               </a:rPr>
+              <a:t>Browser lab track</a:t>
+            </a:r>
+          </a:p>
+        </p:txBody>
+      </p:sp>
+      <p:sp>
+        <p:nvSpPr>
+          <p:cNvPr id="3" name="TextBox 2"/>
+          <p:cNvSpPr txBox="1"/>
+          <p:nvPr/>
+        </p:nvSpPr>
+        <p:spPr>
+          <a:xfrm>
+            <a:off x="548640" y="1234440"/>
+            <a:ext cx="11064240" cy="4937760"/>
+          </a:xfrm>
+          <a:prstGeom prst="rect">
+            <a:avLst/>
+          </a:prstGeom>
+          <a:noFill/>
+        </p:spPr>
+        <p:txBody>
+          <a:bodyPr wrap="square">
+            <a:noAutofit/>
+          </a:bodyPr>
+          <a:lstStyle/>
+          <a:p>
+            <a:pPr lvl="0" marL="457200" indent="-228600">
+              <a:buFont typeface="Calibri"/>
+              <a:spcAft>
+                <a:spcPts val="1000"/>
+              </a:spcAft>
+              <a:buSzPct val="100000"/>
+              <a:buChar char="•"/>
+              <a:lnSpc>
+                <a:spcPts val="2200"/>
+              </a:lnSpc>
+            </a:pPr>
+            <a:r>
+              <a:rPr sz="2000" b="0">
+                <a:solidFill>
+                  <a:srgbClr val="333333"/>
+                </a:solidFill>
+                <a:latin typeface="Calibri"/>
+              </a:rPr>
+              <a:t>In the browser lab track, open the </a:t>
+            </a:r>
+            <a:r>
+              <a:rPr sz="2000" b="1">
+                <a:solidFill>
+                  <a:srgbClr val="333333"/>
+                </a:solidFill>
+                <a:latin typeface="Calibri"/>
+              </a:rPr>
+              <a:t>multilevel-partition</a:t>
+            </a:r>
+            <a:r>
+              <a:rPr sz="2000" b="0">
+                <a:solidFill>
+                  <a:srgbClr val="333333"/>
+                </a:solidFill>
+                <a:latin typeface="Calibri"/>
+              </a:rPr>
+              <a:t> lab from the tools shelf</a:t>
+            </a:r>
+          </a:p>
+          <a:p>
+            <a:pPr lvl="0" marL="457200" indent="-228600">
+              <a:buFont typeface="Calibri"/>
+              <a:spcAft>
+                <a:spcPts val="1000"/>
+              </a:spcAft>
+              <a:buSzPct val="100000"/>
+              <a:buChar char="•"/>
+              <a:lnSpc>
+                <a:spcPts val="2200"/>
+              </a:lnSpc>
+            </a:pPr>
+            <a:r>
+              <a:rPr sz="2000" b="0">
+                <a:solidFill>
+                  <a:srgbClr val="333333"/>
+                </a:solidFill>
+                <a:latin typeface="Calibri"/>
+              </a:rPr>
+              <a:t>Load the starter graph, run the algorithm once</a:t>
+            </a:r>
+          </a:p>
+          <a:p>
+            <a:pPr lvl="0" marL="457200" indent="-228600">
+              <a:buFont typeface="Calibri"/>
+              <a:spcAft>
+                <a:spcPts val="1000"/>
+              </a:spcAft>
+              <a:buSzPct val="100000"/>
+              <a:buChar char="•"/>
+              <a:lnSpc>
+                <a:spcPts val="2200"/>
+              </a:lnSpc>
+            </a:pPr>
+            <a:r>
+              <a:rPr sz="2000" b="0">
+                <a:solidFill>
+                  <a:srgbClr val="333333"/>
+                </a:solidFill>
+                <a:latin typeface="Calibri"/>
+              </a:rPr>
+              <a:t>Work the challenges that lock the goldens</a:t>
+            </a:r>
+          </a:p>
+        </p:txBody>
+      </p:sp>
+      <p:sp>
+        <p:nvSpPr>
+          <p:cNvPr id="4" name="TextBox 3"/>
+          <p:cNvSpPr txBox="1"/>
+          <p:nvPr/>
+        </p:nvSpPr>
+        <p:spPr>
+          <a:xfrm>
+            <a:off x="548640" y="6355080"/>
+            <a:ext cx="11064240" cy="320040"/>
+          </a:xfrm>
+          <a:prstGeom prst="rect">
+            <a:avLst/>
+          </a:prstGeom>
+          <a:noFill/>
+        </p:spPr>
+        <p:txBody>
+          <a:bodyPr wrap="square">
+            <a:noAutofit/>
+          </a:bodyPr>
+          <a:lstStyle/>
+          <a:p>
+            <a:pPr algn="r">
+              <a:lnSpc>
+                <a:spcPts val="2200"/>
+              </a:lnSpc>
+              <a:defRPr sz="1000" b="0">
+                <a:solidFill>
+                  <a:srgbClr val="666666"/>
+                </a:solidFill>
+                <a:latin typeface="Calibri"/>
+              </a:defRPr>
+            </a:pPr>
+            <a:r>
+              <a:t>learn_partitioning — 01 multilevel partition</a:t>
+            </a:r>
+          </a:p>
+        </p:txBody>
+      </p:sp>
+    </p:spTree>
+  </p:cSld>
+  <p:clrMapOvr>
+    <a:masterClrMapping/>
+  </p:clrMapOvr>
+</p:sld>
+</file>
+
+<file path=ppt/slides/slide12.xml><?xml version="1.0" encoding="utf-8"?>
+<p:sld xmlns:a="http://schemas.openxmlformats.org/drawingml/2006/main" xmlns:p="http://schemas.openxmlformats.org/presentationml/2006/main" xmlns:r="http://schemas.openxmlformats.org/officeDocument/2006/relationships">
+  <p:cSld>
+    <p:spTree>
+      <p:nvGrpSpPr>
+        <p:cNvPr id="1" name=""/>
+        <p:cNvGrpSpPr/>
+        <p:nvPr/>
+      </p:nvGrpSpPr>
+      <p:grpSpPr/>
+      <p:sp>
+        <p:nvSpPr>
+          <p:cNvPr id="2" name="TextBox 1"/>
+          <p:cNvSpPr txBox="1"/>
+          <p:nvPr/>
+        </p:nvSpPr>
+        <p:spPr>
+          <a:xfrm>
+            <a:off x="548640" y="411480"/>
+            <a:ext cx="11064240" cy="777240"/>
+          </a:xfrm>
+          <a:prstGeom prst="rect">
+            <a:avLst/>
+          </a:prstGeom>
+          <a:noFill/>
+        </p:spPr>
+        <p:txBody>
+          <a:bodyPr wrap="square">
+            <a:noAutofit/>
+          </a:bodyPr>
+          <a:lstStyle/>
+          <a:p>
+            <a:pPr>
+              <a:lnSpc>
+                <a:spcPts val="2200"/>
+              </a:lnSpc>
+            </a:pPr>
+            <a:r>
+              <a:rPr sz="2800" b="1">
+                <a:solidFill>
+                  <a:srgbClr val="1A1A2E"/>
+                </a:solidFill>
+                <a:latin typeface="Calibri"/>
+              </a:rPr>
+              <a:t>Implement track</a:t>
+            </a:r>
+          </a:p>
+        </p:txBody>
+      </p:sp>
+      <p:sp>
+        <p:nvSpPr>
+          <p:cNvPr id="3" name="TextBox 2"/>
+          <p:cNvSpPr txBox="1"/>
+          <p:nvPr/>
+        </p:nvSpPr>
+        <p:spPr>
+          <a:xfrm>
+            <a:off x="548640" y="1234440"/>
+            <a:ext cx="11064240" cy="4937760"/>
+          </a:xfrm>
+          <a:prstGeom prst="rect">
+            <a:avLst/>
+          </a:prstGeom>
+          <a:noFill/>
+        </p:spPr>
+        <p:txBody>
+          <a:bodyPr wrap="square">
+            <a:noAutofit/>
+          </a:bodyPr>
+          <a:lstStyle/>
+          <a:p>
+            <a:pPr lvl="0" marL="457200" indent="-228600">
+              <a:buFont typeface="Calibri"/>
+              <a:spcAft>
+                <a:spcPts val="1000"/>
+              </a:spcAft>
+              <a:buSzPct val="100000"/>
+              <a:buChar char="•"/>
+              <a:lnSpc>
+                <a:spcPts val="2200"/>
+              </a:lnSpc>
+            </a:pPr>
+            <a:r>
+              <a:rPr sz="2000" b="0">
+                <a:solidFill>
+                  <a:srgbClr val="333333"/>
+                </a:solidFill>
+                <a:latin typeface="Calibri"/>
+              </a:rPr>
+              <a:t>In the implement track</a:t>
+            </a:r>
+          </a:p>
+          <a:p>
+            <a:pPr lvl="0" marL="457200" indent="-228600">
+              <a:buFont typeface="Calibri"/>
+              <a:spcAft>
+                <a:spcPts val="1000"/>
+              </a:spcAft>
+              <a:buSzPct val="100000"/>
+              <a:buChar char="•"/>
+              <a:lnSpc>
+                <a:spcPts val="2200"/>
+              </a:lnSpc>
+            </a:pPr>
+            <a:r>
+              <a:rPr sz="2000" b="0">
+                <a:solidFill>
+                  <a:srgbClr val="333333"/>
+                </a:solidFill>
+                <a:latin typeface="Calibri"/>
+              </a:rPr>
+              <a:t>Parse the tiny graph, run the algorithm with a deterministic seed</a:t>
+            </a:r>
+          </a:p>
+          <a:p>
+            <a:pPr lvl="0" marL="457200" indent="-228600">
+              <a:buFont typeface="Calibri"/>
+              <a:spcAft>
+                <a:spcPts val="1000"/>
+              </a:spcAft>
+              <a:buSzPct val="100000"/>
+              <a:buChar char="•"/>
+              <a:lnSpc>
+                <a:spcPts val="2200"/>
+              </a:lnSpc>
+            </a:pPr>
+            <a:r>
+              <a:rPr sz="2000" b="0">
+                <a:solidFill>
+                  <a:srgbClr val="333333"/>
+                </a:solidFill>
+                <a:latin typeface="Calibri"/>
+              </a:rPr>
+              <a:t>Match the browser goldens before you claim the checklist</a:t>
+            </a:r>
+          </a:p>
+        </p:txBody>
+      </p:sp>
+      <p:sp>
+        <p:nvSpPr>
+          <p:cNvPr id="4" name="TextBox 3"/>
+          <p:cNvSpPr txBox="1"/>
+          <p:nvPr/>
+        </p:nvSpPr>
+        <p:spPr>
+          <a:xfrm>
+            <a:off x="548640" y="6355080"/>
+            <a:ext cx="11064240" cy="320040"/>
+          </a:xfrm>
+          <a:prstGeom prst="rect">
+            <a:avLst/>
+          </a:prstGeom>
+          <a:noFill/>
+        </p:spPr>
+        <p:txBody>
+          <a:bodyPr wrap="square">
+            <a:noAutofit/>
+          </a:bodyPr>
+          <a:lstStyle/>
+          <a:p>
+            <a:pPr algn="r">
+              <a:lnSpc>
+                <a:spcPts val="2200"/>
+              </a:lnSpc>
+              <a:defRPr sz="1000" b="0">
+                <a:solidFill>
+                  <a:srgbClr val="666666"/>
+                </a:solidFill>
+                <a:latin typeface="Calibri"/>
+              </a:defRPr>
+            </a:pPr>
+            <a:r>
+              <a:t>learn_partitioning — 01 multilevel partition</a:t>
+            </a:r>
+          </a:p>
+        </p:txBody>
+      </p:sp>
+    </p:spTree>
+  </p:cSld>
+  <p:clrMapOvr>
+    <a:masterClrMapping/>
+  </p:clrMapOvr>
+</p:sld>
+</file>
+
+<file path=ppt/slides/slide13.xml><?xml version="1.0" encoding="utf-8"?>
+<p:sld xmlns:a="http://schemas.openxmlformats.org/drawingml/2006/main" xmlns:p="http://schemas.openxmlformats.org/presentationml/2006/main" xmlns:r="http://schemas.openxmlformats.org/officeDocument/2006/relationships">
+  <p:cSld>
+    <p:spTree>
+      <p:nvGrpSpPr>
+        <p:cNvPr id="1" name=""/>
+        <p:cNvGrpSpPr/>
+        <p:nvPr/>
+      </p:nvGrpSpPr>
+      <p:grpSpPr/>
+      <p:sp>
+        <p:nvSpPr>
+          <p:cNvPr id="2" name="TextBox 1"/>
+          <p:cNvSpPr txBox="1"/>
+          <p:nvPr/>
+        </p:nvSpPr>
+        <p:spPr>
+          <a:xfrm>
+            <a:off x="548640" y="411480"/>
+            <a:ext cx="11064240" cy="777240"/>
+          </a:xfrm>
+          <a:prstGeom prst="rect">
+            <a:avLst/>
+          </a:prstGeom>
+          <a:noFill/>
+        </p:spPr>
+        <p:txBody>
+          <a:bodyPr wrap="square">
+            <a:noAutofit/>
+          </a:bodyPr>
+          <a:lstStyle/>
+          <a:p>
+            <a:pPr>
+              <a:lnSpc>
+                <a:spcPts val="2200"/>
+              </a:lnSpc>
+            </a:pPr>
+            <a:r>
+              <a:rPr sz="2800" b="1">
+                <a:solidFill>
+                  <a:srgbClr val="1A1A2E"/>
+                </a:solidFill>
+                <a:latin typeface="Calibri"/>
+              </a:rPr>
+              <a:t>Pitfalls</a:t>
+            </a:r>
+          </a:p>
+        </p:txBody>
+      </p:sp>
+      <p:sp>
+        <p:nvSpPr>
+          <p:cNvPr id="3" name="TextBox 2"/>
+          <p:cNvSpPr txBox="1"/>
+          <p:nvPr/>
+        </p:nvSpPr>
+        <p:spPr>
+          <a:xfrm>
+            <a:off x="548640" y="1234440"/>
+            <a:ext cx="11064240" cy="4937760"/>
+          </a:xfrm>
+          <a:prstGeom prst="rect">
+            <a:avLst/>
+          </a:prstGeom>
+          <a:noFill/>
+        </p:spPr>
+        <p:txBody>
+          <a:bodyPr wrap="square">
+            <a:noAutofit/>
+          </a:bodyPr>
+          <a:lstStyle/>
+          <a:p>
+            <a:pPr lvl="0" marL="457200" indent="-228600">
+              <a:buFont typeface="Calibri"/>
+              <a:spcAft>
+                <a:spcPts val="1000"/>
+              </a:spcAft>
+              <a:buSzPct val="100000"/>
+              <a:buChar char="•"/>
+              <a:lnSpc>
+                <a:spcPts val="2200"/>
+              </a:lnSpc>
+            </a:pPr>
+            <a:r>
+              <a:rPr sz="2000" b="0">
+                <a:solidFill>
+                  <a:srgbClr val="333333"/>
+                </a:solidFill>
+                <a:latin typeface="Calibri"/>
+              </a:rPr>
+              <a:t>Common traps</a:t>
+            </a:r>
+          </a:p>
+          <a:p>
+            <a:pPr lvl="0" marL="457200" indent="-228600">
+              <a:buFont typeface="Calibri"/>
+              <a:spcAft>
+                <a:spcPts val="1000"/>
+              </a:spcAft>
+              <a:buSzPct val="100000"/>
+              <a:buChar char="•"/>
+              <a:lnSpc>
+                <a:spcPts val="2200"/>
+              </a:lnSpc>
+            </a:pPr>
+            <a:r>
+              <a:rPr sz="2000" b="0">
+                <a:solidFill>
+                  <a:srgbClr val="333333"/>
+                </a:solidFill>
+                <a:latin typeface="Calibri"/>
+              </a:rPr>
+              <a:t>For multilevel flows, verify coarsening before you blame the refiner</a:t>
+            </a:r>
+          </a:p>
+        </p:txBody>
+      </p:sp>
+      <p:sp>
+        <p:nvSpPr>
+          <p:cNvPr id="4" name="TextBox 3"/>
+          <p:cNvSpPr txBox="1"/>
+          <p:nvPr/>
+        </p:nvSpPr>
+        <p:spPr>
+          <a:xfrm>
+            <a:off x="548640" y="6355080"/>
+            <a:ext cx="11064240" cy="320040"/>
+          </a:xfrm>
+          <a:prstGeom prst="rect">
+            <a:avLst/>
+          </a:prstGeom>
+          <a:noFill/>
+        </p:spPr>
+        <p:txBody>
+          <a:bodyPr wrap="square">
+            <a:noAutofit/>
+          </a:bodyPr>
+          <a:lstStyle/>
+          <a:p>
+            <a:pPr algn="r">
+              <a:lnSpc>
+                <a:spcPts val="2200"/>
+              </a:lnSpc>
+              <a:defRPr sz="1000" b="0">
+                <a:solidFill>
+                  <a:srgbClr val="666666"/>
+                </a:solidFill>
+                <a:latin typeface="Calibri"/>
+              </a:defRPr>
+            </a:pPr>
+            <a:r>
+              <a:t>learn_partitioning — 01 multilevel partition</a:t>
+            </a:r>
+          </a:p>
+        </p:txBody>
+      </p:sp>
+    </p:spTree>
+  </p:cSld>
+  <p:clrMapOvr>
+    <a:masterClrMapping/>
+  </p:clrMapOvr>
+</p:sld>
+</file>
+
+<file path=ppt/slides/slide14.xml><?xml version="1.0" encoding="utf-8"?>
+<p:sld xmlns:a="http://schemas.openxmlformats.org/drawingml/2006/main" xmlns:p="http://schemas.openxmlformats.org/presentationml/2006/main" xmlns:r="http://schemas.openxmlformats.org/officeDocument/2006/relationships">
+  <p:cSld>
+    <p:spTree>
+      <p:nvGrpSpPr>
+        <p:cNvPr id="1" name=""/>
+        <p:cNvGrpSpPr/>
+        <p:nvPr/>
+      </p:nvGrpSpPr>
+      <p:grpSpPr/>
+      <p:sp>
+        <p:nvSpPr>
+          <p:cNvPr id="2" name="TextBox 1"/>
+          <p:cNvSpPr txBox="1"/>
+          <p:nvPr/>
+        </p:nvSpPr>
+        <p:spPr>
+          <a:xfrm>
+            <a:off x="548640" y="411480"/>
+            <a:ext cx="11064240" cy="777240"/>
+          </a:xfrm>
+          <a:prstGeom prst="rect">
+            <a:avLst/>
+          </a:prstGeom>
+          <a:noFill/>
+        </p:spPr>
+        <p:txBody>
+          <a:bodyPr wrap="square">
+            <a:noAutofit/>
+          </a:bodyPr>
+          <a:lstStyle/>
+          <a:p>
+            <a:pPr>
+              <a:lnSpc>
+                <a:spcPts val="2200"/>
+              </a:lnSpc>
+            </a:pPr>
+            <a:r>
+              <a:rPr sz="2800" b="1">
+                <a:solidFill>
+                  <a:srgbClr val="1A1A2E"/>
+                </a:solidFill>
+                <a:latin typeface="Calibri"/>
+              </a:rPr>
               <a:t>Your turn</a:t>
             </a:r>
           </a:p>
@@ -4844,6 +5528,125 @@
               <a:t>A bug in coarsening poisons every finer level</a:t>
             </a:r>
           </a:p>
+        </p:txBody>
+      </p:sp>
+      <p:sp>
+        <p:nvSpPr>
+          <p:cNvPr id="4" name="TextBox 3"/>
+          <p:cNvSpPr txBox="1"/>
+          <p:nvPr/>
+        </p:nvSpPr>
+        <p:spPr>
+          <a:xfrm>
+            <a:off x="548640" y="6355080"/>
+            <a:ext cx="11064240" cy="320040"/>
+          </a:xfrm>
+          <a:prstGeom prst="rect">
+            <a:avLst/>
+          </a:prstGeom>
+          <a:noFill/>
+        </p:spPr>
+        <p:txBody>
+          <a:bodyPr wrap="square">
+            <a:noAutofit/>
+          </a:bodyPr>
+          <a:lstStyle/>
+          <a:p>
+            <a:pPr algn="r">
+              <a:lnSpc>
+                <a:spcPts val="2200"/>
+              </a:lnSpc>
+              <a:defRPr sz="1000" b="0">
+                <a:solidFill>
+                  <a:srgbClr val="666666"/>
+                </a:solidFill>
+                <a:latin typeface="Calibri"/>
+              </a:defRPr>
+            </a:pPr>
+            <a:r>
+              <a:t>learn_partitioning — 01 multilevel partition</a:t>
+            </a:r>
+          </a:p>
+        </p:txBody>
+      </p:sp>
+    </p:spTree>
+  </p:cSld>
+  <p:clrMapOvr>
+    <a:masterClrMapping/>
+  </p:clrMapOvr>
+</p:sld>
+</file>
+
+<file path=ppt/slides/slide3.xml><?xml version="1.0" encoding="utf-8"?>
+<p:sld xmlns:a="http://schemas.openxmlformats.org/drawingml/2006/main" xmlns:p="http://schemas.openxmlformats.org/presentationml/2006/main" xmlns:r="http://schemas.openxmlformats.org/officeDocument/2006/relationships">
+  <p:cSld>
+    <p:spTree>
+      <p:nvGrpSpPr>
+        <p:cNvPr id="1" name=""/>
+        <p:cNvGrpSpPr/>
+        <p:nvPr/>
+      </p:nvGrpSpPr>
+      <p:grpSpPr/>
+      <p:sp>
+        <p:nvSpPr>
+          <p:cNvPr id="2" name="TextBox 1"/>
+          <p:cNvSpPr txBox="1"/>
+          <p:nvPr/>
+        </p:nvSpPr>
+        <p:spPr>
+          <a:xfrm>
+            <a:off x="548640" y="411480"/>
+            <a:ext cx="11064240" cy="777240"/>
+          </a:xfrm>
+          <a:prstGeom prst="rect">
+            <a:avLst/>
+          </a:prstGeom>
+          <a:noFill/>
+        </p:spPr>
+        <p:txBody>
+          <a:bodyPr wrap="square">
+            <a:noAutofit/>
+          </a:bodyPr>
+          <a:lstStyle/>
+          <a:p>
+            <a:pPr>
+              <a:lnSpc>
+                <a:spcPts val="2200"/>
+              </a:lnSpc>
+            </a:pPr>
+            <a:r>
+              <a:rPr sz="2800" b="1">
+                <a:solidFill>
+                  <a:srgbClr val="1A1A2E"/>
+                </a:solidFill>
+                <a:latin typeface="Calibri"/>
+              </a:rPr>
+              <a:t>Pseudocode</a:t>
+            </a:r>
+          </a:p>
+        </p:txBody>
+      </p:sp>
+      <p:sp>
+        <p:nvSpPr>
+          <p:cNvPr id="3" name="TextBox 2"/>
+          <p:cNvSpPr txBox="1"/>
+          <p:nvPr/>
+        </p:nvSpPr>
+        <p:spPr>
+          <a:xfrm>
+            <a:off x="548640" y="1234440"/>
+            <a:ext cx="11064240" cy="4937760"/>
+          </a:xfrm>
+          <a:prstGeom prst="rect">
+            <a:avLst/>
+          </a:prstGeom>
+          <a:noFill/>
+        </p:spPr>
+        <p:txBody>
+          <a:bodyPr wrap="square">
+            <a:noAutofit/>
+          </a:bodyPr>
+          <a:lstStyle/>
           <a:p>
             <a:pPr lvl="0" marL="457200" indent="-228600">
               <a:buFont typeface="Calibri"/>
@@ -4863,7 +5666,51 @@
                 </a:solidFill>
                 <a:latin typeface="Calibri"/>
               </a:rPr>
-              <a:t>&lt;!-- algorithm-walkthrough --&gt;</a:t>
+              <a:t>Multilevel is a V-cycle in pseudocode</a:t>
+            </a:r>
+          </a:p>
+          <a:p>
+            <a:pPr lvl="0" marL="457200" indent="-228600">
+              <a:buFont typeface="Calibri"/>
+              <a:spcAft>
+                <a:spcPts val="1000"/>
+              </a:spcAft>
+              <a:buSzPct val="100000"/>
+              <a:buChar char="•"/>
+              <a:lnSpc>
+                <a:spcPts val="2200"/>
+              </a:lnSpc>
+            </a:pPr>
+            <a:r>
+              <a:rPr sz="2000" b="0">
+                <a:solidFill>
+                  <a:srgbClr val="333333"/>
+                </a:solidFill>
+                <a:latin typeface="Calibri"/>
+              </a:rPr>
+              <a:t>Open this module's examples file and find the Pseudocode section</a:t>
+            </a:r>
+          </a:p>
+          <a:p>
+            <a:pPr lvl="0" marL="457200" indent="-228600">
+              <a:buFont typeface="Calibri"/>
+              <a:spcAft>
+                <a:spcPts val="1000"/>
+              </a:spcAft>
+              <a:buSzPct val="100000"/>
+              <a:buChar char="•"/>
+              <a:lnSpc>
+                <a:spcPts val="2200"/>
+              </a:lnSpc>
+            </a:pPr>
+            <a:r>
+              <a:rPr sz="2000" b="0">
+                <a:solidFill>
+                  <a:srgbClr val="333333"/>
+                </a:solidFill>
+                <a:latin typeface="Calibri"/>
+              </a:rPr>
+              <a:t>That written sketch is what you implement on the implement track and what the browser</a:t>
             </a:r>
           </a:p>
         </p:txBody>
@@ -4915,7 +5762,424 @@
 </p:sld>
 </file>
 
-<file path=ppt/slides/slide3.xml><?xml version="1.0" encoding="utf-8"?>
+<file path=ppt/slides/slide4.xml><?xml version="1.0" encoding="utf-8"?>
+<p:sld xmlns:a="http://schemas.openxmlformats.org/drawingml/2006/main" xmlns:p="http://schemas.openxmlformats.org/presentationml/2006/main" xmlns:r="http://schemas.openxmlformats.org/officeDocument/2006/relationships">
+  <p:cSld>
+    <p:spTree>
+      <p:nvGrpSpPr>
+        <p:cNvPr id="1" name=""/>
+        <p:cNvGrpSpPr/>
+        <p:nvPr/>
+      </p:nvGrpSpPr>
+      <p:grpSpPr/>
+      <p:sp>
+        <p:nvSpPr>
+          <p:cNvPr id="2" name="TextBox 1"/>
+          <p:cNvSpPr txBox="1"/>
+          <p:nvPr/>
+        </p:nvSpPr>
+        <p:spPr>
+          <a:xfrm>
+            <a:off x="548640" y="411480"/>
+            <a:ext cx="11064240" cy="777240"/>
+          </a:xfrm>
+          <a:prstGeom prst="rect">
+            <a:avLst/>
+          </a:prstGeom>
+          <a:noFill/>
+        </p:spPr>
+        <p:txBody>
+          <a:bodyPr wrap="square">
+            <a:noAutofit/>
+          </a:bodyPr>
+          <a:lstStyle/>
+          <a:p>
+            <a:pPr>
+              <a:lnSpc>
+                <a:spcPts val="2200"/>
+              </a:lnSpc>
+            </a:pPr>
+            <a:r>
+              <a:rPr sz="2800" b="1">
+                <a:solidFill>
+                  <a:srgbClr val="1A1A2E"/>
+                </a:solidFill>
+                <a:latin typeface="Calibri"/>
+              </a:rPr>
+              <a:t>Algorithm sketch</a:t>
+            </a:r>
+          </a:p>
+        </p:txBody>
+      </p:sp>
+      <p:sp>
+        <p:nvSpPr>
+          <p:cNvPr id="3" name="TextBox 2"/>
+          <p:cNvSpPr txBox="1"/>
+          <p:nvPr/>
+        </p:nvSpPr>
+        <p:spPr>
+          <a:xfrm>
+            <a:off x="548640" y="1234440"/>
+            <a:ext cx="11064240" cy="4937760"/>
+          </a:xfrm>
+          <a:prstGeom prst="rect">
+            <a:avLst/>
+          </a:prstGeom>
+          <a:noFill/>
+        </p:spPr>
+        <p:txBody>
+          <a:bodyPr wrap="square">
+            <a:noAutofit/>
+          </a:bodyPr>
+          <a:lstStyle/>
+          <a:p>
+            <a:pPr lvl="0" marL="457200" indent="-228600">
+              <a:buFont typeface="Calibri"/>
+              <a:spcAft>
+                <a:spcPts val="1000"/>
+              </a:spcAft>
+              <a:buSzPct val="100000"/>
+              <a:buChar char="•"/>
+              <a:lnSpc>
+                <a:spcPts val="2200"/>
+              </a:lnSpc>
+            </a:pPr>
+            <a:r>
+              <a:rPr sz="2000" b="0">
+                <a:solidFill>
+                  <a:srgbClr val="333333"/>
+                </a:solidFill>
+                <a:latin typeface="Calibri"/>
+              </a:rPr>
+              <a:t>On TINY_GRAPH the projected seed is already ABC versus DE at cut three</a:t>
+            </a:r>
+          </a:p>
+          <a:p>
+            <a:pPr lvl="0" marL="457200" indent="-228600">
+              <a:buFont typeface="Calibri"/>
+              <a:spcAft>
+                <a:spcPts val="1000"/>
+              </a:spcAft>
+              <a:buSzPct val="100000"/>
+              <a:buChar char="•"/>
+              <a:lnSpc>
+                <a:spcPts val="2200"/>
+              </a:lnSpc>
+            </a:pPr>
+            <a:r>
+              <a:rPr sz="2000" b="0">
+                <a:solidFill>
+                  <a:srgbClr val="333333"/>
+                </a:solidFill>
+                <a:latin typeface="Calibri"/>
+              </a:rPr>
+              <a:t>Refine keeps that cut, multilevel beats polishing the cut-twelve bad seed alone</a:t>
+            </a:r>
+          </a:p>
+        </p:txBody>
+      </p:sp>
+      <p:sp>
+        <p:nvSpPr>
+          <p:cNvPr id="4" name="TextBox 3"/>
+          <p:cNvSpPr txBox="1"/>
+          <p:nvPr/>
+        </p:nvSpPr>
+        <p:spPr>
+          <a:xfrm>
+            <a:off x="548640" y="6355080"/>
+            <a:ext cx="11064240" cy="320040"/>
+          </a:xfrm>
+          <a:prstGeom prst="rect">
+            <a:avLst/>
+          </a:prstGeom>
+          <a:noFill/>
+        </p:spPr>
+        <p:txBody>
+          <a:bodyPr wrap="square">
+            <a:noAutofit/>
+          </a:bodyPr>
+          <a:lstStyle/>
+          <a:p>
+            <a:pPr algn="r">
+              <a:lnSpc>
+                <a:spcPts val="2200"/>
+              </a:lnSpc>
+              <a:defRPr sz="1000" b="0">
+                <a:solidFill>
+                  <a:srgbClr val="666666"/>
+                </a:solidFill>
+                <a:latin typeface="Calibri"/>
+              </a:defRPr>
+            </a:pPr>
+            <a:r>
+              <a:t>learn_partitioning — 01 multilevel partition</a:t>
+            </a:r>
+          </a:p>
+        </p:txBody>
+      </p:sp>
+    </p:spTree>
+  </p:cSld>
+  <p:clrMapOvr>
+    <a:masterClrMapping/>
+  </p:clrMapOvr>
+</p:sld>
+</file>
+
+<file path=ppt/slides/slide5.xml><?xml version="1.0" encoding="utf-8"?>
+<p:sld xmlns:a="http://schemas.openxmlformats.org/drawingml/2006/main" xmlns:p="http://schemas.openxmlformats.org/presentationml/2006/main" xmlns:r="http://schemas.openxmlformats.org/officeDocument/2006/relationships">
+  <p:cSld>
+    <p:spTree>
+      <p:nvGrpSpPr>
+        <p:cNvPr id="1" name=""/>
+        <p:cNvGrpSpPr/>
+        <p:nvPr/>
+      </p:nvGrpSpPr>
+      <p:grpSpPr/>
+      <p:sp>
+        <p:nvSpPr>
+          <p:cNvPr id="2" name="TextBox 1"/>
+          <p:cNvSpPr txBox="1"/>
+          <p:nvPr/>
+        </p:nvSpPr>
+        <p:spPr>
+          <a:xfrm>
+            <a:off x="548640" y="411480"/>
+            <a:ext cx="11064240" cy="777240"/>
+          </a:xfrm>
+          <a:prstGeom prst="rect">
+            <a:avLst/>
+          </a:prstGeom>
+          <a:noFill/>
+        </p:spPr>
+        <p:txBody>
+          <a:bodyPr wrap="square">
+            <a:noAutofit/>
+          </a:bodyPr>
+          <a:lstStyle/>
+          <a:p>
+            <a:pPr>
+              <a:lnSpc>
+                <a:spcPts val="2200"/>
+              </a:lnSpc>
+            </a:pPr>
+            <a:r>
+              <a:rPr sz="2800" b="1">
+                <a:solidFill>
+                  <a:srgbClr val="1A1A2E"/>
+                </a:solidFill>
+                <a:latin typeface="Calibri"/>
+              </a:rPr>
+              <a:t>Algorithm sketch — try these</a:t>
+            </a:r>
+          </a:p>
+        </p:txBody>
+      </p:sp>
+      <p:sp>
+        <p:nvSpPr>
+          <p:cNvPr id="3" name="TextBox 2"/>
+          <p:cNvSpPr txBox="1"/>
+          <p:nvPr/>
+        </p:nvSpPr>
+        <p:spPr>
+          <a:xfrm>
+            <a:off x="548640" y="1143000"/>
+            <a:ext cx="11064240" cy="5029200"/>
+          </a:xfrm>
+          <a:prstGeom prst="rect">
+            <a:avLst/>
+          </a:prstGeom>
+          <a:solidFill>
+            <a:srgbClr val="F4F4F4"/>
+          </a:solidFill>
+        </p:spPr>
+        <p:txBody>
+          <a:bodyPr wrap="square">
+            <a:noAutofit/>
+          </a:bodyPr>
+          <a:lstStyle/>
+          <a:p>
+            <a:pPr>
+              <a:lnSpc>
+                <a:spcPts val="2200"/>
+              </a:lnSpc>
+              <a:spcAft>
+                <a:spcPts val="400"/>
+              </a:spcAft>
+            </a:pPr>
+            <a:r>
+              <a:rPr sz="2000" b="0">
+                <a:solidFill>
+                  <a:srgbClr val="333333"/>
+                </a:solidFill>
+                <a:latin typeface="Consolas"/>
+              </a:rPr>
+              <a:t>INPUT: G, coarsen until tiny</a:t>
+            </a:r>
+          </a:p>
+          <a:p>
+            <a:pPr>
+              <a:lnSpc>
+                <a:spcPts val="2200"/>
+              </a:lnSpc>
+              <a:spcAft>
+                <a:spcPts val="400"/>
+              </a:spcAft>
+            </a:pPr>
+            <a:r>
+              <a:rPr sz="2000" b="0">
+                <a:solidFill>
+                  <a:srgbClr val="333333"/>
+                </a:solidFill>
+                <a:latin typeface="Consolas"/>
+              </a:rPr>
+              <a:t>OUTPUT: fine side[]</a:t>
+            </a:r>
+          </a:p>
+          <a:p>
+            <a:pPr>
+              <a:lnSpc>
+                <a:spcPts val="2200"/>
+              </a:lnSpc>
+              <a:spcAft>
+                <a:spcPts val="400"/>
+              </a:spcAft>
+            </a:pPr>
+            <a:r>
+              <a:rPr sz="2000" b="0">
+                <a:solidFill>
+                  <a:srgbClr val="333333"/>
+                </a:solidFill>
+                <a:latin typeface="Consolas"/>
+              </a:rPr>
+              <a:t>coarsen: match/cluster heavy edges</a:t>
+            </a:r>
+          </a:p>
+          <a:p>
+            <a:pPr>
+              <a:lnSpc>
+                <a:spcPts val="2200"/>
+              </a:lnSpc>
+              <a:spcAft>
+                <a:spcPts val="400"/>
+              </a:spcAft>
+            </a:pPr>
+            <a:r>
+              <a:rPr sz="2000" b="0">
+                <a:solidFill>
+                  <a:srgbClr val="333333"/>
+                </a:solidFill>
+                <a:latin typeface="Consolas"/>
+              </a:rPr>
+              <a:t>partition coarse (spectral/KL/FM)</a:t>
+            </a:r>
+          </a:p>
+          <a:p>
+            <a:pPr>
+              <a:lnSpc>
+                <a:spcPts val="2200"/>
+              </a:lnSpc>
+              <a:spcAft>
+                <a:spcPts val="400"/>
+              </a:spcAft>
+            </a:pPr>
+            <a:r>
+              <a:rPr sz="2000" b="0">
+                <a:solidFill>
+                  <a:srgbClr val="333333"/>
+                </a:solidFill>
+                <a:latin typeface="Consolas"/>
+              </a:rPr>
+              <a:t>project labels to finer level</a:t>
+            </a:r>
+          </a:p>
+          <a:p>
+            <a:pPr>
+              <a:lnSpc>
+                <a:spcPts val="2200"/>
+              </a:lnSpc>
+              <a:spcAft>
+                <a:spcPts val="400"/>
+              </a:spcAft>
+            </a:pPr>
+            <a:r>
+              <a:rPr sz="2000" b="0">
+                <a:solidFill>
+                  <a:srgbClr val="333333"/>
+                </a:solidFill>
+                <a:latin typeface="Consolas"/>
+              </a:rPr>
+              <a:t>refine with FM/KL at each uncoarsen</a:t>
+            </a:r>
+          </a:p>
+          <a:p>
+            <a:pPr>
+              <a:lnSpc>
+                <a:spcPts val="2200"/>
+              </a:lnSpc>
+              <a:spcAft>
+                <a:spcPts val="400"/>
+              </a:spcAft>
+            </a:pPr>
+            <a:r>
+              <a:rPr sz="2000" b="0">
+                <a:solidFill>
+                  <a:srgbClr val="333333"/>
+                </a:solidFill>
+                <a:latin typeface="Consolas"/>
+              </a:rPr>
+              <a:t>GOLDEN project ABC|DE cut=3; refine keeps 3</a:t>
+            </a:r>
+          </a:p>
+        </p:txBody>
+      </p:sp>
+      <p:sp>
+        <p:nvSpPr>
+          <p:cNvPr id="4" name="TextBox 3"/>
+          <p:cNvSpPr txBox="1"/>
+          <p:nvPr/>
+        </p:nvSpPr>
+        <p:spPr>
+          <a:xfrm>
+            <a:off x="548640" y="6355080"/>
+            <a:ext cx="11064240" cy="320040"/>
+          </a:xfrm>
+          <a:prstGeom prst="rect">
+            <a:avLst/>
+          </a:prstGeom>
+          <a:noFill/>
+        </p:spPr>
+        <p:txBody>
+          <a:bodyPr wrap="square">
+            <a:noAutofit/>
+          </a:bodyPr>
+          <a:lstStyle/>
+          <a:p>
+            <a:pPr algn="r">
+              <a:lnSpc>
+                <a:spcPts val="2200"/>
+              </a:lnSpc>
+              <a:defRPr sz="1000" b="0">
+                <a:solidFill>
+                  <a:srgbClr val="666666"/>
+                </a:solidFill>
+                <a:latin typeface="Calibri"/>
+              </a:defRPr>
+            </a:pPr>
+            <a:r>
+              <a:t>learn_partitioning — 01 multilevel partition</a:t>
+            </a:r>
+          </a:p>
+        </p:txBody>
+      </p:sp>
+    </p:spTree>
+  </p:cSld>
+  <p:clrMapOvr>
+    <a:masterClrMapping/>
+  </p:clrMapOvr>
+</p:sld>
+</file>
+
+<file path=ppt/slides/slide6.xml><?xml version="1.0" encoding="utf-8"?>
 <p:sld xmlns:a="http://schemas.openxmlformats.org/drawingml/2006/main" xmlns:p="http://schemas.openxmlformats.org/presentationml/2006/main" xmlns:r="http://schemas.openxmlformats.org/officeDocument/2006/relationships">
   <p:cSld>
     <p:spTree>
@@ -5074,7 +6338,7 @@
 </p:sld>
 </file>
 
-<file path=ppt/slides/slide4.xml><?xml version="1.0" encoding="utf-8"?>
+<file path=ppt/slides/slide7.xml><?xml version="1.0" encoding="utf-8"?>
 <p:sld xmlns:a="http://schemas.openxmlformats.org/drawingml/2006/main" xmlns:p="http://schemas.openxmlformats.org/presentationml/2006/main" xmlns:r="http://schemas.openxmlformats.org/officeDocument/2006/relationships">
   <p:cSld>
     <p:spTree>
@@ -5233,7 +6497,7 @@
 </p:sld>
 </file>
 
-<file path=ppt/slides/slide5.xml><?xml version="1.0" encoding="utf-8"?>
+<file path=ppt/slides/slide8.xml><?xml version="1.0" encoding="utf-8"?>
 <p:sld xmlns:a="http://schemas.openxmlformats.org/drawingml/2006/main" xmlns:p="http://schemas.openxmlformats.org/presentationml/2006/main" xmlns:r="http://schemas.openxmlformats.org/officeDocument/2006/relationships">
   <p:cSld>
     <p:spTree>
@@ -5392,7 +6656,7 @@
 </p:sld>
 </file>
 
-<file path=ppt/slides/slide6.xml><?xml version="1.0" encoding="utf-8"?>
+<file path=ppt/slides/slide9.xml><?xml version="1.0" encoding="utf-8"?>
 <p:sld xmlns:a="http://schemas.openxmlformats.org/drawingml/2006/main" xmlns:p="http://schemas.openxmlformats.org/presentationml/2006/main" xmlns:r="http://schemas.openxmlformats.org/officeDocument/2006/relationships">
   <p:cSld>
     <p:spTree>
@@ -5507,553 +6771,6 @@
       <p:sp>
         <p:nvSpPr>
           <p:cNvPr id="5" name="TextBox 4"/>
-          <p:cNvSpPr txBox="1"/>
-          <p:nvPr/>
-        </p:nvSpPr>
-        <p:spPr>
-          <a:xfrm>
-            <a:off x="548640" y="6355080"/>
-            <a:ext cx="11064240" cy="320040"/>
-          </a:xfrm>
-          <a:prstGeom prst="rect">
-            <a:avLst/>
-          </a:prstGeom>
-          <a:noFill/>
-        </p:spPr>
-        <p:txBody>
-          <a:bodyPr wrap="square">
-            <a:noAutofit/>
-          </a:bodyPr>
-          <a:lstStyle/>
-          <a:p>
-            <a:pPr algn="r">
-              <a:lnSpc>
-                <a:spcPts val="2200"/>
-              </a:lnSpc>
-              <a:defRPr sz="1000" b="0">
-                <a:solidFill>
-                  <a:srgbClr val="666666"/>
-                </a:solidFill>
-                <a:latin typeface="Calibri"/>
-              </a:defRPr>
-            </a:pPr>
-            <a:r>
-              <a:t>learn_partitioning — 01 multilevel partition</a:t>
-            </a:r>
-          </a:p>
-        </p:txBody>
-      </p:sp>
-    </p:spTree>
-  </p:cSld>
-  <p:clrMapOvr>
-    <a:masterClrMapping/>
-  </p:clrMapOvr>
-</p:sld>
-</file>
-
-<file path=ppt/slides/slide7.xml><?xml version="1.0" encoding="utf-8"?>
-<p:sld xmlns:a="http://schemas.openxmlformats.org/drawingml/2006/main" xmlns:p="http://schemas.openxmlformats.org/presentationml/2006/main" xmlns:r="http://schemas.openxmlformats.org/officeDocument/2006/relationships">
-  <p:cSld>
-    <p:spTree>
-      <p:nvGrpSpPr>
-        <p:cNvPr id="1" name=""/>
-        <p:cNvGrpSpPr/>
-        <p:nvPr/>
-      </p:nvGrpSpPr>
-      <p:grpSpPr/>
-      <p:sp>
-        <p:nvSpPr>
-          <p:cNvPr id="2" name="TextBox 1"/>
-          <p:cNvSpPr txBox="1"/>
-          <p:nvPr/>
-        </p:nvSpPr>
-        <p:spPr>
-          <a:xfrm>
-            <a:off x="548640" y="411480"/>
-            <a:ext cx="11064240" cy="777240"/>
-          </a:xfrm>
-          <a:prstGeom prst="rect">
-            <a:avLst/>
-          </a:prstGeom>
-          <a:noFill/>
-        </p:spPr>
-        <p:txBody>
-          <a:bodyPr wrap="square">
-            <a:noAutofit/>
-          </a:bodyPr>
-          <a:lstStyle/>
-          <a:p>
-            <a:pPr>
-              <a:lnSpc>
-                <a:spcPts val="2200"/>
-              </a:lnSpc>
-            </a:pPr>
-            <a:r>
-              <a:rPr sz="2800" b="1">
-                <a:solidFill>
-                  <a:srgbClr val="1A1A2E"/>
-                </a:solidFill>
-                <a:latin typeface="Calibri"/>
-              </a:rPr>
-              <a:t>Multilevel V-cycle mindset</a:t>
-            </a:r>
-          </a:p>
-        </p:txBody>
-      </p:sp>
-      <p:pic>
-        <p:nvPicPr>
-          <p:cNvPr id="3" name="Picture 2" descr="05-takeaway.png"/>
-          <p:cNvPicPr>
-            <a:picLocks noChangeAspect="1"/>
-          </p:cNvPicPr>
-          <p:nvPr/>
-        </p:nvPicPr>
-        <p:blipFill>
-          <a:blip r:embed="rId2"/>
-          <a:stretch>
-            <a:fillRect/>
-          </a:stretch>
-        </p:blipFill>
-        <p:spPr>
-          <a:xfrm>
-            <a:off x="548640" y="1143000"/>
-            <a:ext cx="9404113" cy="4572000"/>
-          </a:xfrm>
-          <a:prstGeom prst="rect">
-            <a:avLst/>
-          </a:prstGeom>
-        </p:spPr>
-      </p:pic>
-      <p:sp>
-        <p:nvSpPr>
-          <p:cNvPr id="4" name="TextBox 3"/>
-          <p:cNvSpPr txBox="1"/>
-          <p:nvPr/>
-        </p:nvSpPr>
-        <p:spPr>
-          <a:xfrm>
-            <a:off x="548640" y="5897880"/>
-            <a:ext cx="11064240" cy="411480"/>
-          </a:xfrm>
-          <a:prstGeom prst="rect">
-            <a:avLst/>
-          </a:prstGeom>
-          <a:noFill/>
-        </p:spPr>
-        <p:txBody>
-          <a:bodyPr wrap="square">
-            <a:noAutofit/>
-          </a:bodyPr>
-          <a:lstStyle/>
-          <a:p>
-            <a:pPr>
-              <a:lnSpc>
-                <a:spcPts val="2200"/>
-              </a:lnSpc>
-            </a:pPr>
-            <a:r>
-              <a:rPr sz="1200" b="0">
-                <a:solidFill>
-                  <a:srgbClr val="333333"/>
-                </a:solidFill>
-                <a:latin typeface="Calibri"/>
-              </a:rPr>
-              <a:t>Multilevel V-cycle mindset</a:t>
-            </a:r>
-          </a:p>
-        </p:txBody>
-      </p:sp>
-      <p:sp>
-        <p:nvSpPr>
-          <p:cNvPr id="5" name="TextBox 4"/>
-          <p:cNvSpPr txBox="1"/>
-          <p:nvPr/>
-        </p:nvSpPr>
-        <p:spPr>
-          <a:xfrm>
-            <a:off x="548640" y="6355080"/>
-            <a:ext cx="11064240" cy="320040"/>
-          </a:xfrm>
-          <a:prstGeom prst="rect">
-            <a:avLst/>
-          </a:prstGeom>
-          <a:noFill/>
-        </p:spPr>
-        <p:txBody>
-          <a:bodyPr wrap="square">
-            <a:noAutofit/>
-          </a:bodyPr>
-          <a:lstStyle/>
-          <a:p>
-            <a:pPr algn="r">
-              <a:lnSpc>
-                <a:spcPts val="2200"/>
-              </a:lnSpc>
-              <a:defRPr sz="1000" b="0">
-                <a:solidFill>
-                  <a:srgbClr val="666666"/>
-                </a:solidFill>
-                <a:latin typeface="Calibri"/>
-              </a:defRPr>
-            </a:pPr>
-            <a:r>
-              <a:t>learn_partitioning — 01 multilevel partition</a:t>
-            </a:r>
-          </a:p>
-        </p:txBody>
-      </p:sp>
-    </p:spTree>
-  </p:cSld>
-  <p:clrMapOvr>
-    <a:masterClrMapping/>
-  </p:clrMapOvr>
-</p:sld>
-</file>
-
-<file path=ppt/slides/slide8.xml><?xml version="1.0" encoding="utf-8"?>
-<p:sld xmlns:a="http://schemas.openxmlformats.org/drawingml/2006/main" xmlns:p="http://schemas.openxmlformats.org/presentationml/2006/main" xmlns:r="http://schemas.openxmlformats.org/officeDocument/2006/relationships">
-  <p:cSld>
-    <p:spTree>
-      <p:nvGrpSpPr>
-        <p:cNvPr id="1" name=""/>
-        <p:cNvGrpSpPr/>
-        <p:nvPr/>
-      </p:nvGrpSpPr>
-      <p:grpSpPr/>
-      <p:sp>
-        <p:nvSpPr>
-          <p:cNvPr id="2" name="TextBox 1"/>
-          <p:cNvSpPr txBox="1"/>
-          <p:nvPr/>
-        </p:nvSpPr>
-        <p:spPr>
-          <a:xfrm>
-            <a:off x="548640" y="411480"/>
-            <a:ext cx="11064240" cy="777240"/>
-          </a:xfrm>
-          <a:prstGeom prst="rect">
-            <a:avLst/>
-          </a:prstGeom>
-          <a:noFill/>
-        </p:spPr>
-        <p:txBody>
-          <a:bodyPr wrap="square">
-            <a:noAutofit/>
-          </a:bodyPr>
-          <a:lstStyle/>
-          <a:p>
-            <a:pPr>
-              <a:lnSpc>
-                <a:spcPts val="2200"/>
-              </a:lnSpc>
-            </a:pPr>
-            <a:r>
-              <a:rPr sz="2800" b="1">
-                <a:solidFill>
-                  <a:srgbClr val="1A1A2E"/>
-                </a:solidFill>
-                <a:latin typeface="Calibri"/>
-              </a:rPr>
-              <a:t>Browser lab track</a:t>
-            </a:r>
-          </a:p>
-        </p:txBody>
-      </p:sp>
-      <p:sp>
-        <p:nvSpPr>
-          <p:cNvPr id="3" name="TextBox 2"/>
-          <p:cNvSpPr txBox="1"/>
-          <p:nvPr/>
-        </p:nvSpPr>
-        <p:spPr>
-          <a:xfrm>
-            <a:off x="548640" y="1234440"/>
-            <a:ext cx="11064240" cy="4937760"/>
-          </a:xfrm>
-          <a:prstGeom prst="rect">
-            <a:avLst/>
-          </a:prstGeom>
-          <a:noFill/>
-        </p:spPr>
-        <p:txBody>
-          <a:bodyPr wrap="square">
-            <a:noAutofit/>
-          </a:bodyPr>
-          <a:lstStyle/>
-          <a:p>
-            <a:pPr lvl="0" marL="457200" indent="-228600">
-              <a:buFont typeface="Calibri"/>
-              <a:spcAft>
-                <a:spcPts val="1000"/>
-              </a:spcAft>
-              <a:buSzPct val="100000"/>
-              <a:buChar char="•"/>
-              <a:lnSpc>
-                <a:spcPts val="2200"/>
-              </a:lnSpc>
-            </a:pPr>
-            <a:r>
-              <a:rPr sz="2000" b="0">
-                <a:solidFill>
-                  <a:srgbClr val="333333"/>
-                </a:solidFill>
-                <a:latin typeface="Calibri"/>
-              </a:rPr>
-              <a:t>In the browser lab track, open the </a:t>
-            </a:r>
-            <a:r>
-              <a:rPr sz="2000" b="1">
-                <a:solidFill>
-                  <a:srgbClr val="333333"/>
-                </a:solidFill>
-                <a:latin typeface="Calibri"/>
-              </a:rPr>
-              <a:t>multilevel-partition</a:t>
-            </a:r>
-            <a:r>
-              <a:rPr sz="2000" b="0">
-                <a:solidFill>
-                  <a:srgbClr val="333333"/>
-                </a:solidFill>
-                <a:latin typeface="Calibri"/>
-              </a:rPr>
-              <a:t> lab from the tools shelf</a:t>
-            </a:r>
-          </a:p>
-          <a:p>
-            <a:pPr lvl="0" marL="457200" indent="-228600">
-              <a:buFont typeface="Calibri"/>
-              <a:spcAft>
-                <a:spcPts val="1000"/>
-              </a:spcAft>
-              <a:buSzPct val="100000"/>
-              <a:buChar char="•"/>
-              <a:lnSpc>
-                <a:spcPts val="2200"/>
-              </a:lnSpc>
-            </a:pPr>
-            <a:r>
-              <a:rPr sz="2000" b="0">
-                <a:solidFill>
-                  <a:srgbClr val="333333"/>
-                </a:solidFill>
-                <a:latin typeface="Calibri"/>
-              </a:rPr>
-              <a:t>Load the starter graph, run the algorithm once</a:t>
-            </a:r>
-          </a:p>
-          <a:p>
-            <a:pPr lvl="0" marL="457200" indent="-228600">
-              <a:buFont typeface="Calibri"/>
-              <a:spcAft>
-                <a:spcPts val="1000"/>
-              </a:spcAft>
-              <a:buSzPct val="100000"/>
-              <a:buChar char="•"/>
-              <a:lnSpc>
-                <a:spcPts val="2200"/>
-              </a:lnSpc>
-            </a:pPr>
-            <a:r>
-              <a:rPr sz="2000" b="0">
-                <a:solidFill>
-                  <a:srgbClr val="333333"/>
-                </a:solidFill>
-                <a:latin typeface="Calibri"/>
-              </a:rPr>
-              <a:t>Work the challenges that lock the goldens</a:t>
-            </a:r>
-          </a:p>
-        </p:txBody>
-      </p:sp>
-      <p:sp>
-        <p:nvSpPr>
-          <p:cNvPr id="4" name="TextBox 3"/>
-          <p:cNvSpPr txBox="1"/>
-          <p:nvPr/>
-        </p:nvSpPr>
-        <p:spPr>
-          <a:xfrm>
-            <a:off x="548640" y="6355080"/>
-            <a:ext cx="11064240" cy="320040"/>
-          </a:xfrm>
-          <a:prstGeom prst="rect">
-            <a:avLst/>
-          </a:prstGeom>
-          <a:noFill/>
-        </p:spPr>
-        <p:txBody>
-          <a:bodyPr wrap="square">
-            <a:noAutofit/>
-          </a:bodyPr>
-          <a:lstStyle/>
-          <a:p>
-            <a:pPr algn="r">
-              <a:lnSpc>
-                <a:spcPts val="2200"/>
-              </a:lnSpc>
-              <a:defRPr sz="1000" b="0">
-                <a:solidFill>
-                  <a:srgbClr val="666666"/>
-                </a:solidFill>
-                <a:latin typeface="Calibri"/>
-              </a:defRPr>
-            </a:pPr>
-            <a:r>
-              <a:t>learn_partitioning — 01 multilevel partition</a:t>
-            </a:r>
-          </a:p>
-        </p:txBody>
-      </p:sp>
-    </p:spTree>
-  </p:cSld>
-  <p:clrMapOvr>
-    <a:masterClrMapping/>
-  </p:clrMapOvr>
-</p:sld>
-</file>
-
-<file path=ppt/slides/slide9.xml><?xml version="1.0" encoding="utf-8"?>
-<p:sld xmlns:a="http://schemas.openxmlformats.org/drawingml/2006/main" xmlns:p="http://schemas.openxmlformats.org/presentationml/2006/main" xmlns:r="http://schemas.openxmlformats.org/officeDocument/2006/relationships">
-  <p:cSld>
-    <p:spTree>
-      <p:nvGrpSpPr>
-        <p:cNvPr id="1" name=""/>
-        <p:cNvGrpSpPr/>
-        <p:nvPr/>
-      </p:nvGrpSpPr>
-      <p:grpSpPr/>
-      <p:sp>
-        <p:nvSpPr>
-          <p:cNvPr id="2" name="TextBox 1"/>
-          <p:cNvSpPr txBox="1"/>
-          <p:nvPr/>
-        </p:nvSpPr>
-        <p:spPr>
-          <a:xfrm>
-            <a:off x="548640" y="411480"/>
-            <a:ext cx="11064240" cy="777240"/>
-          </a:xfrm>
-          <a:prstGeom prst="rect">
-            <a:avLst/>
-          </a:prstGeom>
-          <a:noFill/>
-        </p:spPr>
-        <p:txBody>
-          <a:bodyPr wrap="square">
-            <a:noAutofit/>
-          </a:bodyPr>
-          <a:lstStyle/>
-          <a:p>
-            <a:pPr>
-              <a:lnSpc>
-                <a:spcPts val="2200"/>
-              </a:lnSpc>
-            </a:pPr>
-            <a:r>
-              <a:rPr sz="2800" b="1">
-                <a:solidFill>
-                  <a:srgbClr val="1A1A2E"/>
-                </a:solidFill>
-                <a:latin typeface="Calibri"/>
-              </a:rPr>
-              <a:t>Implement track</a:t>
-            </a:r>
-          </a:p>
-        </p:txBody>
-      </p:sp>
-      <p:sp>
-        <p:nvSpPr>
-          <p:cNvPr id="3" name="TextBox 2"/>
-          <p:cNvSpPr txBox="1"/>
-          <p:nvPr/>
-        </p:nvSpPr>
-        <p:spPr>
-          <a:xfrm>
-            <a:off x="548640" y="1234440"/>
-            <a:ext cx="11064240" cy="4937760"/>
-          </a:xfrm>
-          <a:prstGeom prst="rect">
-            <a:avLst/>
-          </a:prstGeom>
-          <a:noFill/>
-        </p:spPr>
-        <p:txBody>
-          <a:bodyPr wrap="square">
-            <a:noAutofit/>
-          </a:bodyPr>
-          <a:lstStyle/>
-          <a:p>
-            <a:pPr lvl="0" marL="457200" indent="-228600">
-              <a:buFont typeface="Calibri"/>
-              <a:spcAft>
-                <a:spcPts val="1000"/>
-              </a:spcAft>
-              <a:buSzPct val="100000"/>
-              <a:buChar char="•"/>
-              <a:lnSpc>
-                <a:spcPts val="2200"/>
-              </a:lnSpc>
-            </a:pPr>
-            <a:r>
-              <a:rPr sz="2000" b="0">
-                <a:solidFill>
-                  <a:srgbClr val="333333"/>
-                </a:solidFill>
-                <a:latin typeface="Calibri"/>
-              </a:rPr>
-              <a:t>In the implement track, open this module’s examples and the course `common/` solvers</a:t>
-            </a:r>
-          </a:p>
-          <a:p>
-            <a:pPr lvl="0" marL="457200" indent="-228600">
-              <a:buFont typeface="Calibri"/>
-              <a:spcAft>
-                <a:spcPts val="1000"/>
-              </a:spcAft>
-              <a:buSzPct val="100000"/>
-              <a:buChar char="•"/>
-              <a:lnSpc>
-                <a:spcPts val="2200"/>
-              </a:lnSpc>
-            </a:pPr>
-            <a:r>
-              <a:rPr sz="2000" b="0">
-                <a:solidFill>
-                  <a:srgbClr val="333333"/>
-                </a:solidFill>
-                <a:latin typeface="Calibri"/>
-              </a:rPr>
-              <a:t>Parse the tiny graph, run the algorithm with a deterministic seed</a:t>
-            </a:r>
-          </a:p>
-          <a:p>
-            <a:pPr lvl="0" marL="457200" indent="-228600">
-              <a:buFont typeface="Calibri"/>
-              <a:spcAft>
-                <a:spcPts val="1000"/>
-              </a:spcAft>
-              <a:buSzPct val="100000"/>
-              <a:buChar char="•"/>
-              <a:lnSpc>
-                <a:spcPts val="2200"/>
-              </a:lnSpc>
-            </a:pPr>
-            <a:r>
-              <a:rPr sz="2000" b="0">
-                <a:solidFill>
-                  <a:srgbClr val="333333"/>
-                </a:solidFill>
-                <a:latin typeface="Calibri"/>
-              </a:rPr>
-              <a:t>Match the browser goldens before you claim the checklist</a:t>
-            </a:r>
-          </a:p>
-        </p:txBody>
-      </p:sp>
-      <p:sp>
-        <p:nvSpPr>
-          <p:cNvPr id="4" name="TextBox 3"/>
           <p:cNvSpPr txBox="1"/>
           <p:nvPr/>
         </p:nvSpPr>
